--- a/2027/GEO330_Fall_Quarter/exercises/Exercise_01/scripts/slides/Exercise01_Template.pptx
+++ b/2027/GEO330_Fall_Quarter/exercises/Exercise_01/scripts/slides/Exercise01_Template.pptx
@@ -119,7 +119,7 @@
 <file path=ppt/revisionInfo.xml><?xml version="1.0" encoding="utf-8"?>
 <p1510:revInfo xmlns:a="http://schemas.openxmlformats.org/drawingml/2006/main" xmlns:r="http://schemas.openxmlformats.org/officeDocument/2006/relationships" xmlns:p1510="http://schemas.microsoft.com/office/powerpoint/2015/10/main">
   <p1510:revLst>
-    <p1510:client id="{CDA1F6B1-B43D-4F92-8722-D0598E1F7E95}" v="8" dt="2026-09-08T02:37:06.340"/>
+    <p1510:client id="{CDA1F6B1-B43D-4F92-8722-D0598E1F7E95}" v="13" dt="2026-09-09T13:38:29.673"/>
   </p1510:revLst>
 </p1510:revInfo>
 </file>
@@ -129,18 +129,18 @@
   <pc:docChgLst>
     <pc:chgData name="Christopher Smith" userId="f635bcaf-d701-437b-bffd-1a8f160c01d9" providerId="ADAL" clId="{321CF1EA-DDCA-4C73-9872-605BFFD8AB88}"/>
     <pc:docChg chg="undo custSel addSld delSld modSld">
-      <pc:chgData name="Christopher Smith" userId="f635bcaf-d701-437b-bffd-1a8f160c01d9" providerId="ADAL" clId="{321CF1EA-DDCA-4C73-9872-605BFFD8AB88}" dt="2026-09-08T19:04:13.808" v="876" actId="20577"/>
+      <pc:chgData name="Christopher Smith" userId="f635bcaf-d701-437b-bffd-1a8f160c01d9" providerId="ADAL" clId="{321CF1EA-DDCA-4C73-9872-605BFFD8AB88}" dt="2026-09-09T13:40:46.399" v="1497" actId="1076"/>
       <pc:docMkLst>
         <pc:docMk/>
       </pc:docMkLst>
       <pc:sldChg chg="modSp mod">
-        <pc:chgData name="Christopher Smith" userId="f635bcaf-d701-437b-bffd-1a8f160c01d9" providerId="ADAL" clId="{321CF1EA-DDCA-4C73-9872-605BFFD8AB88}" dt="2026-09-08T19:04:13.808" v="876" actId="20577"/>
+        <pc:chgData name="Christopher Smith" userId="f635bcaf-d701-437b-bffd-1a8f160c01d9" providerId="ADAL" clId="{321CF1EA-DDCA-4C73-9872-605BFFD8AB88}" dt="2026-09-09T13:40:34.540" v="1496" actId="20577"/>
         <pc:sldMkLst>
           <pc:docMk/>
           <pc:sldMk cId="3196567083" sldId="258"/>
         </pc:sldMkLst>
         <pc:spChg chg="mod">
-          <ac:chgData name="Christopher Smith" userId="f635bcaf-d701-437b-bffd-1a8f160c01d9" providerId="ADAL" clId="{321CF1EA-DDCA-4C73-9872-605BFFD8AB88}" dt="2026-09-08T02:36:15.871" v="818" actId="20577"/>
+          <ac:chgData name="Christopher Smith" userId="f635bcaf-d701-437b-bffd-1a8f160c01d9" providerId="ADAL" clId="{321CF1EA-DDCA-4C73-9872-605BFFD8AB88}" dt="2026-09-09T13:38:48.268" v="1476" actId="20577"/>
           <ac:spMkLst>
             <pc:docMk/>
             <pc:sldMk cId="3196567083" sldId="258"/>
@@ -148,7 +148,7 @@
           </ac:spMkLst>
         </pc:spChg>
         <pc:spChg chg="mod">
-          <ac:chgData name="Christopher Smith" userId="f635bcaf-d701-437b-bffd-1a8f160c01d9" providerId="ADAL" clId="{321CF1EA-DDCA-4C73-9872-605BFFD8AB88}" dt="2026-09-08T19:04:13.808" v="876" actId="20577"/>
+          <ac:chgData name="Christopher Smith" userId="f635bcaf-d701-437b-bffd-1a8f160c01d9" providerId="ADAL" clId="{321CF1EA-DDCA-4C73-9872-605BFFD8AB88}" dt="2026-09-09T13:34:48.237" v="1187" actId="20577"/>
           <ac:spMkLst>
             <pc:docMk/>
             <pc:sldMk cId="3196567083" sldId="258"/>
@@ -156,7 +156,7 @@
           </ac:spMkLst>
         </pc:spChg>
         <pc:spChg chg="mod">
-          <ac:chgData name="Christopher Smith" userId="f635bcaf-d701-437b-bffd-1a8f160c01d9" providerId="ADAL" clId="{321CF1EA-DDCA-4C73-9872-605BFFD8AB88}" dt="2026-09-08T02:33:15.985" v="463" actId="20577"/>
+          <ac:chgData name="Christopher Smith" userId="f635bcaf-d701-437b-bffd-1a8f160c01d9" providerId="ADAL" clId="{321CF1EA-DDCA-4C73-9872-605BFFD8AB88}" dt="2026-09-09T13:40:34.540" v="1496" actId="20577"/>
           <ac:spMkLst>
             <pc:docMk/>
             <pc:sldMk cId="3196567083" sldId="258"/>
@@ -214,7 +214,7 @@
         </pc:sldMkLst>
       </pc:sldChg>
       <pc:sldChg chg="modSp add mod">
-        <pc:chgData name="Christopher Smith" userId="f635bcaf-d701-437b-bffd-1a8f160c01d9" providerId="ADAL" clId="{321CF1EA-DDCA-4C73-9872-605BFFD8AB88}" dt="2026-09-08T02:36:40.673" v="820"/>
+        <pc:chgData name="Christopher Smith" userId="f635bcaf-d701-437b-bffd-1a8f160c01d9" providerId="ADAL" clId="{321CF1EA-DDCA-4C73-9872-605BFFD8AB88}" dt="2026-09-09T13:40:46.399" v="1497" actId="1076"/>
         <pc:sldMkLst>
           <pc:docMk/>
           <pc:sldMk cId="4033029874" sldId="273"/>
@@ -236,7 +236,7 @@
           </ac:spMkLst>
         </pc:spChg>
         <pc:spChg chg="mod">
-          <ac:chgData name="Christopher Smith" userId="f635bcaf-d701-437b-bffd-1a8f160c01d9" providerId="ADAL" clId="{321CF1EA-DDCA-4C73-9872-605BFFD8AB88}" dt="2026-09-08T02:33:48.451" v="488" actId="20577"/>
+          <ac:chgData name="Christopher Smith" userId="f635bcaf-d701-437b-bffd-1a8f160c01d9" providerId="ADAL" clId="{321CF1EA-DDCA-4C73-9872-605BFFD8AB88}" dt="2026-09-09T13:40:46.399" v="1497" actId="1076"/>
           <ac:spMkLst>
             <pc:docMk/>
             <pc:sldMk cId="4033029874" sldId="273"/>
@@ -245,7 +245,7 @@
         </pc:spChg>
       </pc:sldChg>
       <pc:sldChg chg="modSp add mod">
-        <pc:chgData name="Christopher Smith" userId="f635bcaf-d701-437b-bffd-1a8f160c01d9" providerId="ADAL" clId="{321CF1EA-DDCA-4C73-9872-605BFFD8AB88}" dt="2026-09-08T02:36:47.933" v="824" actId="20577"/>
+        <pc:chgData name="Christopher Smith" userId="f635bcaf-d701-437b-bffd-1a8f160c01d9" providerId="ADAL" clId="{321CF1EA-DDCA-4C73-9872-605BFFD8AB88}" dt="2026-09-08T22:17:51.562" v="1144" actId="20577"/>
         <pc:sldMkLst>
           <pc:docMk/>
           <pc:sldMk cId="1945915822" sldId="274"/>
@@ -267,22 +267,30 @@
           </ac:spMkLst>
         </pc:spChg>
         <pc:spChg chg="mod">
-          <ac:chgData name="Christopher Smith" userId="f635bcaf-d701-437b-bffd-1a8f160c01d9" providerId="ADAL" clId="{321CF1EA-DDCA-4C73-9872-605BFFD8AB88}" dt="2026-09-08T02:36:03.215" v="811" actId="20577"/>
+          <ac:chgData name="Christopher Smith" userId="f635bcaf-d701-437b-bffd-1a8f160c01d9" providerId="ADAL" clId="{321CF1EA-DDCA-4C73-9872-605BFFD8AB88}" dt="2026-09-08T22:16:45.481" v="1036"/>
           <ac:spMkLst>
             <pc:docMk/>
             <pc:sldMk cId="1945915822" sldId="274"/>
             <ac:spMk id="11" creationId="{88351F3F-5752-69F6-9538-D292669878BE}"/>
           </ac:spMkLst>
         </pc:spChg>
+        <pc:spChg chg="mod">
+          <ac:chgData name="Christopher Smith" userId="f635bcaf-d701-437b-bffd-1a8f160c01d9" providerId="ADAL" clId="{321CF1EA-DDCA-4C73-9872-605BFFD8AB88}" dt="2026-09-08T22:17:51.562" v="1144" actId="20577"/>
+          <ac:spMkLst>
+            <pc:docMk/>
+            <pc:sldMk cId="1945915822" sldId="274"/>
+            <ac:spMk id="12" creationId="{3ACA1447-8728-1184-29E2-3464F249A700}"/>
+          </ac:spMkLst>
+        </pc:spChg>
       </pc:sldChg>
-      <pc:sldChg chg="modSp add mod">
-        <pc:chgData name="Christopher Smith" userId="f635bcaf-d701-437b-bffd-1a8f160c01d9" providerId="ADAL" clId="{321CF1EA-DDCA-4C73-9872-605BFFD8AB88}" dt="2026-09-08T02:37:09.738" v="863" actId="20577"/>
+      <pc:sldChg chg="delSp modSp add mod">
+        <pc:chgData name="Christopher Smith" userId="f635bcaf-d701-437b-bffd-1a8f160c01d9" providerId="ADAL" clId="{321CF1EA-DDCA-4C73-9872-605BFFD8AB88}" dt="2026-09-08T22:18:41.321" v="1159" actId="20577"/>
         <pc:sldMkLst>
           <pc:docMk/>
           <pc:sldMk cId="3803463582" sldId="275"/>
         </pc:sldMkLst>
         <pc:spChg chg="mod">
-          <ac:chgData name="Christopher Smith" userId="f635bcaf-d701-437b-bffd-1a8f160c01d9" providerId="ADAL" clId="{321CF1EA-DDCA-4C73-9872-605BFFD8AB88}" dt="2026-09-08T02:37:09.738" v="863" actId="20577"/>
+          <ac:chgData name="Christopher Smith" userId="f635bcaf-d701-437b-bffd-1a8f160c01d9" providerId="ADAL" clId="{321CF1EA-DDCA-4C73-9872-605BFFD8AB88}" dt="2026-09-08T22:17:36.653" v="1137" actId="20577"/>
           <ac:spMkLst>
             <pc:docMk/>
             <pc:sldMk cId="3803463582" sldId="275"/>
@@ -290,38 +298,62 @@
           </ac:spMkLst>
         </pc:spChg>
         <pc:spChg chg="mod">
-          <ac:chgData name="Christopher Smith" userId="f635bcaf-d701-437b-bffd-1a8f160c01d9" providerId="ADAL" clId="{321CF1EA-DDCA-4C73-9872-605BFFD8AB88}" dt="2026-09-08T02:27:43.063" v="252" actId="20577"/>
+          <ac:chgData name="Christopher Smith" userId="f635bcaf-d701-437b-bffd-1a8f160c01d9" providerId="ADAL" clId="{321CF1EA-DDCA-4C73-9872-605BFFD8AB88}" dt="2026-09-08T22:17:09.983" v="1066" actId="27636"/>
           <ac:spMkLst>
             <pc:docMk/>
             <pc:sldMk cId="3803463582" sldId="275"/>
             <ac:spMk id="6" creationId="{952B8E5A-8181-1590-5580-E925766C154A}"/>
           </ac:spMkLst>
         </pc:spChg>
+        <pc:spChg chg="mod">
+          <ac:chgData name="Christopher Smith" userId="f635bcaf-d701-437b-bffd-1a8f160c01d9" providerId="ADAL" clId="{321CF1EA-DDCA-4C73-9872-605BFFD8AB88}" dt="2026-09-08T22:18:41.321" v="1159" actId="20577"/>
+          <ac:spMkLst>
+            <pc:docMk/>
+            <pc:sldMk cId="3803463582" sldId="275"/>
+            <ac:spMk id="11" creationId="{37D97EBE-2CC4-2AEF-5E63-2C1BEB89A7B9}"/>
+          </ac:spMkLst>
+        </pc:spChg>
+        <pc:spChg chg="del">
+          <ac:chgData name="Christopher Smith" userId="f635bcaf-d701-437b-bffd-1a8f160c01d9" providerId="ADAL" clId="{321CF1EA-DDCA-4C73-9872-605BFFD8AB88}" dt="2026-09-08T22:17:39.829" v="1138" actId="478"/>
+          <ac:spMkLst>
+            <pc:docMk/>
+            <pc:sldMk cId="3803463582" sldId="275"/>
+            <ac:spMk id="12" creationId="{A1B47200-A8D0-F68B-2CA0-D4757846FB08}"/>
+          </ac:spMkLst>
+        </pc:spChg>
       </pc:sldChg>
-      <pc:sldChg chg="modSp add mod">
-        <pc:chgData name="Christopher Smith" userId="f635bcaf-d701-437b-bffd-1a8f160c01d9" providerId="ADAL" clId="{321CF1EA-DDCA-4C73-9872-605BFFD8AB88}" dt="2026-09-08T02:36:33.178" v="819"/>
+      <pc:sldChg chg="addSp delSp modSp add mod">
+        <pc:chgData name="Christopher Smith" userId="f635bcaf-d701-437b-bffd-1a8f160c01d9" providerId="ADAL" clId="{321CF1EA-DDCA-4C73-9872-605BFFD8AB88}" dt="2026-09-09T13:38:18.986" v="1445" actId="20577"/>
         <pc:sldMkLst>
           <pc:docMk/>
           <pc:sldMk cId="72989767" sldId="276"/>
         </pc:sldMkLst>
         <pc:spChg chg="mod">
-          <ac:chgData name="Christopher Smith" userId="f635bcaf-d701-437b-bffd-1a8f160c01d9" providerId="ADAL" clId="{321CF1EA-DDCA-4C73-9872-605BFFD8AB88}" dt="2026-09-08T02:36:33.178" v="819"/>
+          <ac:chgData name="Christopher Smith" userId="f635bcaf-d701-437b-bffd-1a8f160c01d9" providerId="ADAL" clId="{321CF1EA-DDCA-4C73-9872-605BFFD8AB88}" dt="2026-09-09T13:38:18.986" v="1445" actId="20577"/>
           <ac:spMkLst>
             <pc:docMk/>
             <pc:sldMk cId="72989767" sldId="276"/>
             <ac:spMk id="3" creationId="{CCCB3394-C44A-7574-6284-F079751AEFC1}"/>
           </ac:spMkLst>
         </pc:spChg>
+        <pc:spChg chg="add mod">
+          <ac:chgData name="Christopher Smith" userId="f635bcaf-d701-437b-bffd-1a8f160c01d9" providerId="ADAL" clId="{321CF1EA-DDCA-4C73-9872-605BFFD8AB88}" dt="2026-09-09T13:36:16.546" v="1328" actId="1035"/>
+          <ac:spMkLst>
+            <pc:docMk/>
+            <pc:sldMk cId="72989767" sldId="276"/>
+            <ac:spMk id="4" creationId="{63221CCC-54C2-4639-24CB-F9975FB54705}"/>
+          </ac:spMkLst>
+        </pc:spChg>
         <pc:spChg chg="mod">
-          <ac:chgData name="Christopher Smith" userId="f635bcaf-d701-437b-bffd-1a8f160c01d9" providerId="ADAL" clId="{321CF1EA-DDCA-4C73-9872-605BFFD8AB88}" dt="2026-09-08T02:30:00.980" v="341" actId="14100"/>
+          <ac:chgData name="Christopher Smith" userId="f635bcaf-d701-437b-bffd-1a8f160c01d9" providerId="ADAL" clId="{321CF1EA-DDCA-4C73-9872-605BFFD8AB88}" dt="2026-09-09T13:34:42.820" v="1185" actId="20577"/>
           <ac:spMkLst>
             <pc:docMk/>
             <pc:sldMk cId="72989767" sldId="276"/>
             <ac:spMk id="6" creationId="{2A0E8101-6FD3-9312-509E-3ACCFF9CD6B5}"/>
           </ac:spMkLst>
         </pc:spChg>
-        <pc:spChg chg="mod">
-          <ac:chgData name="Christopher Smith" userId="f635bcaf-d701-437b-bffd-1a8f160c01d9" providerId="ADAL" clId="{321CF1EA-DDCA-4C73-9872-605BFFD8AB88}" dt="2026-09-08T02:29:31.636" v="317" actId="1076"/>
+        <pc:spChg chg="del mod">
+          <ac:chgData name="Christopher Smith" userId="f635bcaf-d701-437b-bffd-1a8f160c01d9" providerId="ADAL" clId="{321CF1EA-DDCA-4C73-9872-605BFFD8AB88}" dt="2026-09-08T22:13:42.563" v="897" actId="478"/>
           <ac:spMkLst>
             <pc:docMk/>
             <pc:sldMk cId="72989767" sldId="276"/>
@@ -485,7 +517,7 @@
           <a:p>
             <a:fld id="{2F3E8B1C-86EF-43CF-8304-249481088644}" type="datetimeFigureOut">
               <a:rPr lang="en-US" smtClean="0"/>
-              <a:t>9/8/2026</a:t>
+              <a:t>9/9/2026</a:t>
             </a:fld>
             <a:endParaRPr lang="en-US"/>
           </a:p>
@@ -683,7 +715,7 @@
           <a:p>
             <a:fld id="{2F3E8B1C-86EF-43CF-8304-249481088644}" type="datetimeFigureOut">
               <a:rPr lang="en-US" smtClean="0"/>
-              <a:t>9/8/2026</a:t>
+              <a:t>9/9/2026</a:t>
             </a:fld>
             <a:endParaRPr lang="en-US"/>
           </a:p>
@@ -891,7 +923,7 @@
           <a:p>
             <a:fld id="{2F3E8B1C-86EF-43CF-8304-249481088644}" type="datetimeFigureOut">
               <a:rPr lang="en-US" smtClean="0"/>
-              <a:t>9/8/2026</a:t>
+              <a:t>9/9/2026</a:t>
             </a:fld>
             <a:endParaRPr lang="en-US"/>
           </a:p>
@@ -1089,7 +1121,7 @@
           <a:p>
             <a:fld id="{2F3E8B1C-86EF-43CF-8304-249481088644}" type="datetimeFigureOut">
               <a:rPr lang="en-US" smtClean="0"/>
-              <a:t>9/8/2026</a:t>
+              <a:t>9/9/2026</a:t>
             </a:fld>
             <a:endParaRPr lang="en-US"/>
           </a:p>
@@ -1364,7 +1396,7 @@
           <a:p>
             <a:fld id="{2F3E8B1C-86EF-43CF-8304-249481088644}" type="datetimeFigureOut">
               <a:rPr lang="en-US" smtClean="0"/>
-              <a:t>9/8/2026</a:t>
+              <a:t>9/9/2026</a:t>
             </a:fld>
             <a:endParaRPr lang="en-US"/>
           </a:p>
@@ -1634,7 +1666,7 @@
           <a:p>
             <a:fld id="{2F3E8B1C-86EF-43CF-8304-249481088644}" type="datetimeFigureOut">
               <a:rPr lang="en-US" smtClean="0"/>
-              <a:t>9/8/2026</a:t>
+              <a:t>9/9/2026</a:t>
             </a:fld>
             <a:endParaRPr lang="en-US"/>
           </a:p>
@@ -2054,7 +2086,7 @@
           <a:p>
             <a:fld id="{2F3E8B1C-86EF-43CF-8304-249481088644}" type="datetimeFigureOut">
               <a:rPr lang="en-US" smtClean="0"/>
-              <a:t>9/8/2026</a:t>
+              <a:t>9/9/2026</a:t>
             </a:fld>
             <a:endParaRPr lang="en-US"/>
           </a:p>
@@ -2195,7 +2227,7 @@
           <a:p>
             <a:fld id="{2F3E8B1C-86EF-43CF-8304-249481088644}" type="datetimeFigureOut">
               <a:rPr lang="en-US" smtClean="0"/>
-              <a:t>9/8/2026</a:t>
+              <a:t>9/9/2026</a:t>
             </a:fld>
             <a:endParaRPr lang="en-US"/>
           </a:p>
@@ -2308,7 +2340,7 @@
           <a:p>
             <a:fld id="{2F3E8B1C-86EF-43CF-8304-249481088644}" type="datetimeFigureOut">
               <a:rPr lang="en-US" smtClean="0"/>
-              <a:t>9/8/2026</a:t>
+              <a:t>9/9/2026</a:t>
             </a:fld>
             <a:endParaRPr lang="en-US"/>
           </a:p>
@@ -2619,7 +2651,7 @@
           <a:p>
             <a:fld id="{2F3E8B1C-86EF-43CF-8304-249481088644}" type="datetimeFigureOut">
               <a:rPr lang="en-US" smtClean="0"/>
-              <a:t>9/8/2026</a:t>
+              <a:t>9/9/2026</a:t>
             </a:fld>
             <a:endParaRPr lang="en-US"/>
           </a:p>
@@ -2907,7 +2939,7 @@
           <a:p>
             <a:fld id="{2F3E8B1C-86EF-43CF-8304-249481088644}" type="datetimeFigureOut">
               <a:rPr lang="en-US" smtClean="0"/>
-              <a:t>9/8/2026</a:t>
+              <a:t>9/9/2026</a:t>
             </a:fld>
             <a:endParaRPr lang="en-US"/>
           </a:p>
@@ -3148,7 +3180,7 @@
             <a:fld id="{2F3E8B1C-86EF-43CF-8304-249481088644}" type="datetimeFigureOut">
               <a:rPr lang="en-US" smtClean="0"/>
               <a:pPr/>
-              <a:t>9/8/2026</a:t>
+              <a:t>9/9/2026</a:t>
             </a:fld>
             <a:endParaRPr lang="en-US" dirty="0"/>
           </a:p>
@@ -3684,14 +3716,14 @@
             </a:pPr>
             <a:r>
               <a:rPr lang="en-US" sz="3400" dirty="0"/>
-              <a:t>mode share trends,</a:t>
+              <a:t>mode share trends</a:t>
             </a:r>
             <a:br>
               <a:rPr lang="en-US" sz="3400" dirty="0"/>
             </a:br>
             <a:r>
               <a:rPr lang="en-US" sz="3400" dirty="0"/>
-              <a:t>United States,</a:t>
+              <a:t>United States</a:t>
             </a:r>
             <a:br>
               <a:rPr lang="en-US" sz="3400" dirty="0"/>
@@ -3717,8 +3749,8 @@
         </p:nvSpPr>
         <p:spPr>
           <a:xfrm>
-            <a:off x="669852" y="2663113"/>
-            <a:ext cx="5507428" cy="1323439"/>
+            <a:off x="923397" y="2352870"/>
+            <a:ext cx="5507428" cy="2800767"/>
           </a:xfrm>
           <a:prstGeom prst="rect">
             <a:avLst/>
@@ -3735,43 +3767,19 @@
               <a:rPr lang="en-US" sz="1600" i="1" cap="none" dirty="0">
                 <a:latin typeface="Abadi Extra Light" panose="020B0604020202020204" pitchFamily="34" charset="0"/>
               </a:rPr>
-              <a:t>Summarize the commuting trends over th</a:t>
+              <a:t>Use this space to </a:t>
             </a:r>
             <a:r>
               <a:rPr lang="en-US" sz="1600" i="1" dirty="0">
                 <a:latin typeface="Abadi Extra Light" panose="020B0604020202020204" pitchFamily="34" charset="0"/>
               </a:rPr>
-              <a:t>is period </a:t>
+              <a:t>s</a:t>
             </a:r>
             <a:r>
               <a:rPr lang="en-US" sz="1600" i="1" cap="none" dirty="0">
                 <a:latin typeface="Abadi Extra Light" panose="020B0604020202020204" pitchFamily="34" charset="0"/>
               </a:rPr>
-              <a:t>for your selected </a:t>
-            </a:r>
-            <a:r>
-              <a:rPr lang="en-US" sz="1600" i="1" dirty="0">
-                <a:latin typeface="Abadi Extra Light" panose="020B0604020202020204" pitchFamily="34" charset="0"/>
-              </a:rPr>
-              <a:t>county by mode of transportation</a:t>
-            </a:r>
-            <a:r>
-              <a:rPr lang="en-US" sz="1600" i="1" cap="none" dirty="0">
-                <a:latin typeface="Abadi Extra Light" panose="020B0604020202020204" pitchFamily="34" charset="0"/>
-              </a:rPr>
-              <a:t>. What changes and trends do you see in mode share?  How do patterns in this county compare with national trends? What </a:t>
-            </a:r>
-            <a:r>
-              <a:rPr lang="en-US" sz="1600" i="1" dirty="0">
-                <a:latin typeface="Abadi Extra Light" panose="020B0604020202020204" pitchFamily="34" charset="0"/>
-              </a:rPr>
-              <a:t>factors </a:t>
-            </a:r>
-            <a:r>
-              <a:rPr lang="en-US" sz="1600" i="1" cap="none" dirty="0">
-                <a:latin typeface="Abadi Extra Light" panose="020B0604020202020204" pitchFamily="34" charset="0"/>
-              </a:rPr>
-              <a:t>do you feel may help explain these trends?</a:t>
+              <a:t>ummarize nationwide commuting trends by mode of transportation, using the exercise data to describe how commuting patterns have changed over time. What changes and trends do you see in mode share? Are certain modes, such as driving alone, public transit, or working from home, becoming more or less common over the years, and are there any periods where the changes seem especially sharp? What factors do you feel may help explain these trends? Consider whether things like the rise of remote work, gas prices, public transportation investment, or major events such as the COVID-19 pandemic might have played a role in shaping the patterns you observe.</a:t>
             </a:r>
           </a:p>
         </p:txBody>
@@ -3860,7 +3868,14 @@
             <a:pPr algn="ctr"/>
             <a:r>
               <a:rPr lang="en-US" dirty="0"/>
-              <a:t>Insert chart copied from RStudio</a:t>
+              <a:t>Insert national mode share trends plot</a:t>
+            </a:r>
+            <a:br>
+              <a:rPr lang="en-US" dirty="0"/>
+            </a:br>
+            <a:r>
+              <a:rPr lang="en-US" dirty="0"/>
+              <a:t>available in step #3 of exercise.</a:t>
             </a:r>
           </a:p>
         </p:txBody>
@@ -3936,14 +3951,14 @@
             </a:pPr>
             <a:r>
               <a:rPr lang="en-US" sz="3400" dirty="0"/>
-              <a:t>ACTIVE TRANSPORTATION (BIKE, WALK AND PUBLIC TRANSIT) MODE SHARE trends,</a:t>
+              <a:t>MODE SHARE trends</a:t>
             </a:r>
             <a:br>
               <a:rPr lang="en-US" sz="3400" dirty="0"/>
             </a:br>
             <a:r>
               <a:rPr lang="en-US" sz="3400" dirty="0"/>
-              <a:t>[COUNTY],</a:t>
+              <a:t>[INSERT COUNTY, state]</a:t>
             </a:r>
             <a:br>
               <a:rPr lang="en-US" sz="3400" dirty="0"/>
@@ -3951,55 +3966,6 @@
             <a:r>
               <a:rPr lang="en-US" sz="3400" dirty="0"/>
               <a:t>2010-2025</a:t>
-            </a:r>
-          </a:p>
-        </p:txBody>
-      </p:sp>
-      <p:sp>
-        <p:nvSpPr>
-          <p:cNvPr id="11" name="TextBox 10">
-            <a:extLst>
-              <a:ext uri="{FF2B5EF4-FFF2-40B4-BE49-F238E27FC236}">
-                <a16:creationId xmlns:a16="http://schemas.microsoft.com/office/drawing/2014/main" id="{C1E40558-41DA-DEC9-FB85-028CD1394E20}"/>
-              </a:ext>
-            </a:extLst>
-          </p:cNvPr>
-          <p:cNvSpPr txBox="1"/>
-          <p:nvPr/>
-        </p:nvSpPr>
-        <p:spPr>
-          <a:xfrm>
-            <a:off x="669852" y="3365241"/>
-            <a:ext cx="5507428" cy="1323439"/>
-          </a:xfrm>
-          <a:prstGeom prst="rect">
-            <a:avLst/>
-          </a:prstGeom>
-          <a:noFill/>
-        </p:spPr>
-        <p:txBody>
-          <a:bodyPr wrap="square">
-            <a:spAutoFit/>
-          </a:bodyPr>
-          <a:lstStyle/>
-          <a:p>
-            <a:r>
-              <a:rPr lang="en-US" sz="1600" i="1" cap="none" dirty="0">
-                <a:latin typeface="Abadi Extra Light" panose="020B0604020202020204" pitchFamily="34" charset="0"/>
-              </a:rPr>
-              <a:t>Summarize the commuting trends over the past decade for your selected place and mode. What changes and trends do you see in mode share over this period?  How does this compare with national trends? What </a:t>
-            </a:r>
-            <a:r>
-              <a:rPr lang="en-US" sz="1600" i="1" dirty="0">
-                <a:latin typeface="Abadi Extra Light" panose="020B0604020202020204" pitchFamily="34" charset="0"/>
-              </a:rPr>
-              <a:t>factors </a:t>
-            </a:r>
-            <a:r>
-              <a:rPr lang="en-US" sz="1600" i="1" cap="none" dirty="0">
-                <a:latin typeface="Abadi Extra Light" panose="020B0604020202020204" pitchFamily="34" charset="0"/>
-              </a:rPr>
-              <a:t>do you feel may help explain this trend?</a:t>
             </a:r>
           </a:p>
         </p:txBody>
@@ -4088,7 +4054,75 @@
             <a:pPr algn="ctr"/>
             <a:r>
               <a:rPr lang="en-US" dirty="0"/>
-              <a:t>Insert chart copied from RStudio</a:t>
+              <a:t>Insert custom mode share trends plot for your county </a:t>
+            </a:r>
+            <a:br>
+              <a:rPr lang="en-US" dirty="0"/>
+            </a:br>
+            <a:r>
+              <a:rPr lang="en-US" dirty="0"/>
+              <a:t>created in step #3 of exercise.</a:t>
+            </a:r>
+          </a:p>
+        </p:txBody>
+      </p:sp>
+      <p:sp>
+        <p:nvSpPr>
+          <p:cNvPr id="4" name="TextBox 3">
+            <a:extLst>
+              <a:ext uri="{FF2B5EF4-FFF2-40B4-BE49-F238E27FC236}">
+                <a16:creationId xmlns:a16="http://schemas.microsoft.com/office/drawing/2014/main" id="{63221CCC-54C2-4639-24CB-F9975FB54705}"/>
+              </a:ext>
+            </a:extLst>
+          </p:cNvPr>
+          <p:cNvSpPr txBox="1"/>
+          <p:nvPr/>
+        </p:nvSpPr>
+        <p:spPr>
+          <a:xfrm>
+            <a:off x="923397" y="2426350"/>
+            <a:ext cx="5507428" cy="2800767"/>
+          </a:xfrm>
+          <a:prstGeom prst="rect">
+            <a:avLst/>
+          </a:prstGeom>
+          <a:noFill/>
+        </p:spPr>
+        <p:txBody>
+          <a:bodyPr wrap="square">
+            <a:spAutoFit/>
+          </a:bodyPr>
+          <a:lstStyle/>
+          <a:p>
+            <a:r>
+              <a:rPr lang="en-US" sz="1600" i="1" cap="none" dirty="0">
+                <a:latin typeface="Abadi Extra Light" panose="020B0604020202020204" pitchFamily="34" charset="0"/>
+              </a:rPr>
+              <a:t>Now compare mode share trends in your selected county to nationwide patterns. How does your county's mix of commuting modes compare to the national averages, and are the same modes rising or falling in your county as they are nationwide? Are there any notable differences between your county</a:t>
+            </a:r>
+            <a:r>
+              <a:rPr lang="en-US" sz="1600" i="1" dirty="0">
+                <a:latin typeface="Abadi Extra Light" panose="020B0604020202020204" pitchFamily="34" charset="0"/>
+              </a:rPr>
+              <a:t> and </a:t>
+            </a:r>
+            <a:r>
+              <a:rPr lang="en-US" sz="1600" i="1" cap="none" dirty="0">
+                <a:latin typeface="Abadi Extra Light" panose="020B0604020202020204" pitchFamily="34" charset="0"/>
+              </a:rPr>
+              <a:t>neighboring counties (refer to nationwide maps </a:t>
+            </a:r>
+            <a:r>
+              <a:rPr lang="en-US" sz="1600" i="1" dirty="0">
+                <a:latin typeface="Abadi Extra Light" panose="020B0604020202020204" pitchFamily="34" charset="0"/>
+              </a:rPr>
+              <a:t>on exercise web page</a:t>
+            </a:r>
+            <a:r>
+              <a:rPr lang="en-US" sz="1600" i="1" cap="none" dirty="0">
+                <a:latin typeface="Abadi Extra Light" panose="020B0604020202020204" pitchFamily="34" charset="0"/>
+              </a:rPr>
+              <a:t>), and if so, what might explain them? Do you think local factors, such as population density, availability of public transit, average commute distance, or the local job market, could be influencing your county's commuting patterns in ways that differ from national trends?</a:t>
             </a:r>
           </a:p>
         </p:txBody>
@@ -4197,8 +4231,8 @@
         </p:nvSpPr>
         <p:spPr>
           <a:xfrm>
-            <a:off x="669852" y="2663113"/>
-            <a:ext cx="5507428" cy="1077218"/>
+            <a:off x="785439" y="2410025"/>
+            <a:ext cx="5507428" cy="2554545"/>
           </a:xfrm>
           <a:prstGeom prst="rect">
             <a:avLst/>
@@ -4215,19 +4249,7 @@
               <a:rPr lang="en-US" sz="1600" i="1" cap="none" dirty="0">
                 <a:latin typeface="Abadi Extra Light" panose="020B0604020202020204" pitchFamily="34" charset="0"/>
               </a:rPr>
-              <a:t>Summarize pedestrian fatalities over the past decade for your selected place and mode. What trends do you see in pedestrian deaths?  How does this compare with national trends? What </a:t>
-            </a:r>
-            <a:r>
-              <a:rPr lang="en-US" sz="1600" i="1" dirty="0">
-                <a:latin typeface="Abadi Extra Light" panose="020B0604020202020204" pitchFamily="34" charset="0"/>
-              </a:rPr>
-              <a:t>factors </a:t>
-            </a:r>
-            <a:r>
-              <a:rPr lang="en-US" sz="1600" i="1" cap="none" dirty="0">
-                <a:latin typeface="Abadi Extra Light" panose="020B0604020202020204" pitchFamily="34" charset="0"/>
-              </a:rPr>
-              <a:t>do you feel may help explain this trend?</a:t>
+              <a:t>Summarize pedestrian fatalities for your selected place and mode. What trends do you see in pedestrian deaths, and has the number of fatalities generally increased, decreased, or stayed relatively stable over this period? Are there specific years that stand out as noticeably higher or lower, and if so, what might have contributed to those changes? What factors do you feel may help explain this trend? Consider whether things like changes in traffic volume, road design, vehicle size, speed limits, land use patterns, or pedestrian infrastructure investments might be playing a role in the pattern you observe.</a:t>
             </a:r>
           </a:p>
         </p:txBody>
@@ -4426,7 +4448,7 @@
         <p:spPr>
           <a:xfrm>
             <a:off x="669852" y="2663113"/>
-            <a:ext cx="5507428" cy="1077218"/>
+            <a:ext cx="5507428" cy="2800767"/>
           </a:xfrm>
           <a:prstGeom prst="rect">
             <a:avLst/>
@@ -4443,7 +4465,7 @@
               <a:rPr lang="en-US" sz="1600" i="1" dirty="0">
                 <a:latin typeface="Abadi Extra Light" panose="020B0604020202020204" pitchFamily="34" charset="0"/>
               </a:rPr>
-              <a:t>Examine the pedestrian fatality hot spot map that you created for your county. Are there hot spots in your county? If so, how many and where are they located? What do you feel may contribute to this distribution?</a:t>
+              <a:t>Examine the pedestrian fatality hot spot map that you created for your county. Are there hot spots in your county, and if so, how many did you identify and where are they located, such as along major corridors, near intersections, downtown areas, or specific neighborhoods? Do the hot spots appear clustered in a particular part of the county, or are they more scattered? What do you feel may contribute to this distribution? Consider whether factors like traffic volume, road design, speed limits, availability of sidewalks or crosswalks, population density, or proximity to transit stops, schools, or commercial areas might help explain why fatalities are concentrated in these locations.</a:t>
             </a:r>
             <a:endParaRPr lang="en-US" sz="1600" i="1" cap="none" dirty="0">
               <a:latin typeface="Abadi Extra Light" panose="020B0604020202020204" pitchFamily="34" charset="0"/>
@@ -4466,7 +4488,7 @@
         <p:spPr>
           <a:xfrm>
             <a:off x="700331" y="5580302"/>
-            <a:ext cx="5953561" cy="307777"/>
+            <a:ext cx="5953561" cy="523220"/>
           </a:xfrm>
           <a:prstGeom prst="rect">
             <a:avLst/>
@@ -4483,7 +4505,7 @@
               <a:rPr lang="en-US" sz="1400" i="1" dirty="0">
                 <a:latin typeface="Abadi Extra Light" panose="020B0604020202020204" pitchFamily="34" charset="0"/>
               </a:rPr>
-              <a:t>Data sources: US Census Bureau TIGER/Line; ACS 5-Year Estimates B08301.</a:t>
+              <a:t>Data sources: US Census Bureau TIGER/Line; ACS 5-Year Estimates B08301; FARS.</a:t>
             </a:r>
             <a:endParaRPr lang="en-US" sz="1400" i="1" cap="none" dirty="0">
               <a:latin typeface="Abadi Extra Light" panose="020B0604020202020204" pitchFamily="34" charset="0"/>
@@ -4611,7 +4633,7 @@
             </a:pPr>
             <a:r>
               <a:rPr lang="en-US" sz="3400" dirty="0"/>
-              <a:t>INTERSECTION </a:t>
+              <a:t>DESIGN RECOMMENDATIONS </a:t>
             </a:r>
           </a:p>
         </p:txBody>
@@ -4631,7 +4653,7 @@
         <p:spPr>
           <a:xfrm>
             <a:off x="669852" y="2663113"/>
-            <a:ext cx="5507428" cy="1323439"/>
+            <a:ext cx="5507428" cy="1815882"/>
           </a:xfrm>
           <a:prstGeom prst="rect">
             <a:avLst/>
@@ -4645,61 +4667,18 @@
           <a:lstStyle/>
           <a:p>
             <a:r>
-              <a:rPr lang="en-US" sz="1600" i="1" cap="none" dirty="0">
-                <a:latin typeface="Abadi Extra Light" panose="020B0604020202020204" pitchFamily="34" charset="0"/>
-              </a:rPr>
-              <a:t>Summarize the commuting trends over the past decade for your selected place and mode. What changes and trends do you see in mode share over this period?  How does this compare with national trends? What </a:t>
-            </a:r>
-            <a:r>
               <a:rPr lang="en-US" sz="1600" i="1" dirty="0">
                 <a:latin typeface="Abadi Extra Light" panose="020B0604020202020204" pitchFamily="34" charset="0"/>
               </a:rPr>
-              <a:t>factors </a:t>
-            </a:r>
-            <a:r>
-              <a:rPr lang="en-US" sz="1600" i="1" cap="none" dirty="0">
+              <a:t>Use Google Street View to examine one of the hotspot corridors or intersections identified in your map. What do you observe about the street design in this area? What challenges does the current design create for pedestrian safety? What interventions, such as narrower travel lanes, raised crosswalks, protected bike lanes or shorter crossing distances, would you recommend for this </a:t>
+            </a:r>
+            <a:r>
+              <a:rPr lang="en-US" sz="1600" i="1">
                 <a:latin typeface="Abadi Extra Light" panose="020B0604020202020204" pitchFamily="34" charset="0"/>
               </a:rPr>
-              <a:t>do you feel may help explain this trend?</a:t>
-            </a:r>
-          </a:p>
-        </p:txBody>
-      </p:sp>
-      <p:sp>
-        <p:nvSpPr>
-          <p:cNvPr id="12" name="TextBox 11">
-            <a:extLst>
-              <a:ext uri="{FF2B5EF4-FFF2-40B4-BE49-F238E27FC236}">
-                <a16:creationId xmlns:a16="http://schemas.microsoft.com/office/drawing/2014/main" id="{A1B47200-A8D0-F68B-2CA0-D4757846FB08}"/>
-              </a:ext>
-            </a:extLst>
-          </p:cNvPr>
-          <p:cNvSpPr txBox="1"/>
-          <p:nvPr/>
-        </p:nvSpPr>
-        <p:spPr>
-          <a:xfrm>
-            <a:off x="700331" y="5580302"/>
-            <a:ext cx="5953561" cy="307777"/>
-          </a:xfrm>
-          <a:prstGeom prst="rect">
-            <a:avLst/>
-          </a:prstGeom>
-          <a:noFill/>
-        </p:spPr>
-        <p:txBody>
-          <a:bodyPr wrap="square">
-            <a:spAutoFit/>
-          </a:bodyPr>
-          <a:lstStyle/>
-          <a:p>
-            <a:r>
-              <a:rPr lang="en-US" sz="1400" i="1" dirty="0">
-                <a:latin typeface="Abadi Extra Light" panose="020B0604020202020204" pitchFamily="34" charset="0"/>
-              </a:rPr>
-              <a:t>Data sources: US Census Bureau TIGER/Line; ACS 5-Year Estimates B08301.</a:t>
-            </a:r>
-            <a:endParaRPr lang="en-US" sz="1400" i="1" cap="none" dirty="0">
+              <a:t>location?</a:t>
+            </a:r>
+            <a:endParaRPr lang="en-US" sz="1600" i="1" cap="none" dirty="0">
               <a:latin typeface="Abadi Extra Light" panose="020B0604020202020204" pitchFamily="34" charset="0"/>
             </a:endParaRPr>
           </a:p>
@@ -4748,12 +4727,8 @@
           <a:p>
             <a:pPr algn="ctr"/>
             <a:r>
-              <a:rPr lang="en-US"/>
-              <a:t>Insert map </a:t>
-            </a:r>
-            <a:r>
               <a:rPr lang="en-US" dirty="0"/>
-              <a:t>copied from RStudio</a:t>
+              <a:t>Insert map or image copied from Google Streetview</a:t>
             </a:r>
           </a:p>
         </p:txBody>
